--- a/docs/free-rwe-resources/train-the-trainer/training/day-05-treatment-pathways/kit/Instructor-Answer-Key.pptx
+++ b/docs/free-rwe-resources/train-the-trainer/training/day-05-treatment-pathways/kit/Instructor-Answer-Key.pptx
@@ -19,7 +19,7 @@
     <p:sldId id="267" r:id="rId18"/>
     <p:sldId id="268" r:id="rId19"/>
   </p:sldIdLst>
-  <p:sldSz cx="9144000" cy="6858000" type="screen4x3"/>
+  <p:sldSz cx="12192000" cy="6858000" type="screen4x3"/>
   <p:notesSz cx="6858000" cy="9144000"/>
   <p:defaultTextStyle>
     <a:defPPr>
@@ -148,8 +148,8 @@
         </p:nvSpPr>
         <p:spPr>
           <a:xfrm>
-            <a:off x="685800" y="2130425"/>
-            <a:ext cx="7772400" cy="1470025"/>
+            <a:off x="914400" y="2130425"/>
+            <a:ext cx="10363200" cy="1470025"/>
           </a:xfrm>
         </p:spPr>
         <p:txBody>
@@ -176,14 +176,14 @@
         </p:nvSpPr>
         <p:spPr>
           <a:xfrm>
-            <a:off x="1371600" y="3886200"/>
-            <a:ext cx="6400800" cy="1752600"/>
+            <a:off x="1828800" y="3886200"/>
+            <a:ext cx="8534400" cy="1752600"/>
           </a:xfrm>
         </p:spPr>
         <p:txBody>
           <a:bodyPr/>
           <a:lstStyle>
-            <a:lvl1pPr marL="0" indent="0" algn="ctr">
+            <a:lvl1pPr marL="0" indent="0" algn="l">
               <a:buNone/>
               <a:defRPr>
                 <a:solidFill>
@@ -560,8 +560,8 @@
         </p:nvSpPr>
         <p:spPr>
           <a:xfrm>
-            <a:off x="6629400" y="274638"/>
-            <a:ext cx="2057400" cy="5851525"/>
+            <a:off x="8839200" y="274638"/>
+            <a:ext cx="2743200" cy="5851525"/>
           </a:xfrm>
         </p:spPr>
         <p:txBody>
@@ -588,8 +588,8 @@
         </p:nvSpPr>
         <p:spPr>
           <a:xfrm>
-            <a:off x="457200" y="274638"/>
-            <a:ext cx="6019800" cy="5851525"/>
+            <a:off x="609600" y="274638"/>
+            <a:ext cx="8026400" cy="5851525"/>
           </a:xfrm>
         </p:spPr>
         <p:txBody>
@@ -910,46 +910,46 @@
         </p:nvSpPr>
         <p:spPr>
           <a:xfrm>
-            <a:off x="722313" y="4406900"/>
-            <a:ext cx="7772400" cy="1362075"/>
+            <a:off x="963084" y="1920240"/>
+            <a:ext cx="10363200" cy="1280160"/>
           </a:xfrm>
         </p:spPr>
         <p:txBody>
+          <a:bodyPr anchor="b"/>
+          <a:lstStyle>
+            <a:lvl1pPr algn="l">
+              <a:defRPr sz="4000" b="1"/>
+            </a:lvl1pPr>
+          </a:lstStyle>
+          <a:p>
+            <a:r>
+              <a:rPr lang="en-US" smtClean="0"/>
+              <a:t>Click to edit Master title style</a:t>
+            </a:r>
+            <a:endParaRPr lang="en-US"/>
+          </a:p>
+        </p:txBody>
+      </p:sp>
+      <p:sp>
+        <p:nvSpPr>
+          <p:cNvPr id="3" name="Text Placeholder 2"/>
+          <p:cNvSpPr>
+            <a:spLocks noGrp="1"/>
+          </p:cNvSpPr>
+          <p:nvPr>
+            <p:ph type="body" idx="1"/>
+          </p:nvPr>
+        </p:nvSpPr>
+        <p:spPr>
+          <a:xfrm>
+            <a:off x="963084" y="3291840"/>
+            <a:ext cx="10363200" cy="1828800"/>
+          </a:xfrm>
+        </p:spPr>
+        <p:txBody>
           <a:bodyPr anchor="t"/>
           <a:lstStyle>
-            <a:lvl1pPr algn="l">
-              <a:defRPr sz="4000" b="1" cap="all"/>
-            </a:lvl1pPr>
-          </a:lstStyle>
-          <a:p>
-            <a:r>
-              <a:rPr lang="en-US" smtClean="0"/>
-              <a:t>Click to edit Master title style</a:t>
-            </a:r>
-            <a:endParaRPr lang="en-US"/>
-          </a:p>
-        </p:txBody>
-      </p:sp>
-      <p:sp>
-        <p:nvSpPr>
-          <p:cNvPr id="3" name="Text Placeholder 2"/>
-          <p:cNvSpPr>
-            <a:spLocks noGrp="1"/>
-          </p:cNvSpPr>
-          <p:nvPr>
-            <p:ph type="body" idx="1"/>
-          </p:nvPr>
-        </p:nvSpPr>
-        <p:spPr>
-          <a:xfrm>
-            <a:off x="722313" y="2906713"/>
-            <a:ext cx="7772400" cy="1500187"/>
-          </a:xfrm>
-        </p:spPr>
-        <p:txBody>
-          <a:bodyPr anchor="b"/>
-          <a:lstStyle>
-            <a:lvl1pPr marL="0" indent="0">
+            <a:lvl1pPr marL="0" indent="0" algn="l">
               <a:buNone/>
               <a:defRPr sz="2000">
                 <a:solidFill>
@@ -1041,7 +1041,7 @@
             </a:lvl9pPr>
           </a:lstStyle>
           <a:p>
-            <a:pPr lvl="0"/>
+            <a:pPr lvl="0" algn="l"/>
             <a:r>
               <a:rPr lang="en-US" smtClean="0"/>
               <a:t>Click to edit Master text styles</a:t>
@@ -1179,8 +1179,8 @@
         </p:nvSpPr>
         <p:spPr>
           <a:xfrm>
-            <a:off x="457200" y="1600200"/>
-            <a:ext cx="4038600" cy="4525963"/>
+            <a:off x="609600" y="1600200"/>
+            <a:ext cx="5384800" cy="4525963"/>
           </a:xfrm>
         </p:spPr>
         <p:txBody>
@@ -1264,8 +1264,8 @@
         </p:nvSpPr>
         <p:spPr>
           <a:xfrm>
-            <a:off x="4648200" y="1600200"/>
-            <a:ext cx="4038600" cy="4525963"/>
+            <a:off x="6197600" y="1600200"/>
+            <a:ext cx="5384800" cy="4525963"/>
           </a:xfrm>
         </p:spPr>
         <p:txBody>
@@ -1471,8 +1471,8 @@
         </p:nvSpPr>
         <p:spPr>
           <a:xfrm>
-            <a:off x="457200" y="1535113"/>
-            <a:ext cx="4040188" cy="639762"/>
+            <a:off x="609600" y="1535113"/>
+            <a:ext cx="5386917" cy="639762"/>
           </a:xfrm>
         </p:spPr>
         <p:txBody>
@@ -1536,8 +1536,8 @@
         </p:nvSpPr>
         <p:spPr>
           <a:xfrm>
-            <a:off x="457200" y="2174875"/>
-            <a:ext cx="4040188" cy="3951288"/>
+            <a:off x="609600" y="2174875"/>
+            <a:ext cx="5386917" cy="3951288"/>
           </a:xfrm>
         </p:spPr>
         <p:txBody>
@@ -1621,8 +1621,8 @@
         </p:nvSpPr>
         <p:spPr>
           <a:xfrm>
-            <a:off x="4645025" y="1535113"/>
-            <a:ext cx="4041775" cy="639762"/>
+            <a:off x="6193366" y="1535113"/>
+            <a:ext cx="5389033" cy="639762"/>
           </a:xfrm>
         </p:spPr>
         <p:txBody>
@@ -1686,8 +1686,8 @@
         </p:nvSpPr>
         <p:spPr>
           <a:xfrm>
-            <a:off x="4645025" y="2174875"/>
-            <a:ext cx="4041775" cy="3951288"/>
+            <a:off x="6193366" y="2174875"/>
+            <a:ext cx="5389033" cy="3951288"/>
           </a:xfrm>
         </p:spPr>
         <p:txBody>
@@ -2079,8 +2079,8 @@
         </p:nvSpPr>
         <p:spPr>
           <a:xfrm>
-            <a:off x="457200" y="273050"/>
-            <a:ext cx="3008313" cy="1162050"/>
+            <a:off x="609600" y="273050"/>
+            <a:ext cx="4011084" cy="1162050"/>
           </a:xfrm>
         </p:spPr>
         <p:txBody>
@@ -2111,8 +2111,8 @@
         </p:nvSpPr>
         <p:spPr>
           <a:xfrm>
-            <a:off x="3575050" y="273050"/>
-            <a:ext cx="5111750" cy="5853113"/>
+            <a:off x="4766733" y="273050"/>
+            <a:ext cx="6815666" cy="5853113"/>
           </a:xfrm>
         </p:spPr>
         <p:txBody>
@@ -2196,8 +2196,8 @@
         </p:nvSpPr>
         <p:spPr>
           <a:xfrm>
-            <a:off x="457200" y="1435100"/>
-            <a:ext cx="3008313" cy="4691063"/>
+            <a:off x="609600" y="1435100"/>
+            <a:ext cx="4011084" cy="4691063"/>
           </a:xfrm>
         </p:spPr>
         <p:txBody>
@@ -2356,8 +2356,8 @@
         </p:nvSpPr>
         <p:spPr>
           <a:xfrm>
-            <a:off x="1792288" y="4800600"/>
-            <a:ext cx="5486400" cy="566738"/>
+            <a:off x="2389717" y="4800600"/>
+            <a:ext cx="7315200" cy="566738"/>
           </a:xfrm>
         </p:spPr>
         <p:txBody>
@@ -2388,8 +2388,8 @@
         </p:nvSpPr>
         <p:spPr>
           <a:xfrm>
-            <a:off x="1792288" y="612775"/>
-            <a:ext cx="5486400" cy="4114800"/>
+            <a:off x="2389717" y="612775"/>
+            <a:ext cx="7315200" cy="4114800"/>
           </a:xfrm>
         </p:spPr>
         <p:txBody>
@@ -2449,8 +2449,8 @@
         </p:nvSpPr>
         <p:spPr>
           <a:xfrm>
-            <a:off x="1792288" y="5367338"/>
-            <a:ext cx="5486400" cy="804862"/>
+            <a:off x="2389717" y="5367338"/>
+            <a:ext cx="7315200" cy="804862"/>
           </a:xfrm>
         </p:spPr>
         <p:txBody>
@@ -2614,8 +2614,8 @@
         </p:nvSpPr>
         <p:spPr>
           <a:xfrm>
-            <a:off x="457200" y="274638"/>
-            <a:ext cx="8229600" cy="1143000"/>
+            <a:off x="609600" y="274638"/>
+            <a:ext cx="10972800" cy="1143000"/>
           </a:xfrm>
           <a:prstGeom prst="rect">
             <a:avLst/>
@@ -2647,8 +2647,8 @@
         </p:nvSpPr>
         <p:spPr>
           <a:xfrm>
-            <a:off x="457200" y="1600200"/>
-            <a:ext cx="8229600" cy="4525963"/>
+            <a:off x="609600" y="1600200"/>
+            <a:ext cx="10972800" cy="4525963"/>
           </a:xfrm>
           <a:prstGeom prst="rect">
             <a:avLst/>
@@ -2709,8 +2709,8 @@
         </p:nvSpPr>
         <p:spPr>
           <a:xfrm>
-            <a:off x="457200" y="6356350"/>
-            <a:ext cx="2133600" cy="365125"/>
+            <a:off x="609600" y="6356350"/>
+            <a:ext cx="2844800" cy="365125"/>
           </a:xfrm>
           <a:prstGeom prst="rect">
             <a:avLst/>
@@ -2750,8 +2750,8 @@
         </p:nvSpPr>
         <p:spPr>
           <a:xfrm>
-            <a:off x="3124200" y="6356350"/>
-            <a:ext cx="2895600" cy="365125"/>
+            <a:off x="4165600" y="6356350"/>
+            <a:ext cx="3860800" cy="365125"/>
           </a:xfrm>
           <a:prstGeom prst="rect">
             <a:avLst/>
@@ -2787,8 +2787,8 @@
         </p:nvSpPr>
         <p:spPr>
           <a:xfrm>
-            <a:off x="6553200" y="6356350"/>
-            <a:ext cx="2133600" cy="365125"/>
+            <a:off x="8737600" y="6356350"/>
+            <a:ext cx="2844800" cy="365125"/>
           </a:xfrm>
           <a:prstGeom prst="rect">
             <a:avLst/>
@@ -2816,30 +2816,6 @@
           </a:p>
         </p:txBody>
       </p:sp>
-      <p:pic>
-        <p:nvPicPr>
-          <p:cNvPr id="9901" name="ALS TDI Logo"/>
-          <p:cNvPicPr>
-            <a:picLocks noChangeAspect="1"/>
-          </p:cNvPicPr>
-          <p:nvPr/>
-        </p:nvPicPr>
-        <p:blipFill>
-          <a:blip r:embed="rId13"/>
-          <a:stretch>
-            <a:fillRect/>
-          </a:stretch>
-        </p:blipFill>
-        <p:spPr>
-          <a:xfrm>
-            <a:off x="8065008" y="6043049"/>
-            <a:ext cx="914400" cy="705223"/>
-          </a:xfrm>
-          <a:prstGeom prst="rect">
-            <a:avLst/>
-          </a:prstGeom>
-        </p:spPr>
-      </p:pic>
     </p:spTree>
     <p:extLst>
       <p:ext uri="{BB962C8B-B14F-4D97-AF65-F5344CB8AC3E}">
@@ -2863,12 +2839,12 @@
   </p:sldLayoutIdLst>
   <p:txStyles>
     <p:titleStyle>
-      <a:lvl1pPr algn="ctr" defTabSz="457200" rtl="0" eaLnBrk="1" latinLnBrk="0" hangingPunct="1">
+      <a:lvl1pPr algn="l" defTabSz="457200" rtl="0" eaLnBrk="1" latinLnBrk="0" hangingPunct="1">
         <a:spcBef>
           <a:spcPct val="0"/>
         </a:spcBef>
         <a:buNone/>
-        <a:defRPr sz="4400" kern="1200">
+        <a:defRPr sz="3200" kern="1200" b="1">
           <a:solidFill>
             <a:schemeClr val="tx1"/>
           </a:solidFill>
@@ -2885,7 +2861,7 @@
         </a:spcBef>
         <a:buFont typeface="Arial"/>
         <a:buChar char="•"/>
-        <a:defRPr sz="3200" kern="1200">
+        <a:defRPr sz="2000" kern="1200">
           <a:solidFill>
             <a:schemeClr val="tx1"/>
           </a:solidFill>
@@ -2900,7 +2876,7 @@
         </a:spcBef>
         <a:buFont typeface="Arial"/>
         <a:buChar char="–"/>
-        <a:defRPr sz="2800" kern="1200">
+        <a:defRPr sz="1800" kern="1200">
           <a:solidFill>
             <a:schemeClr val="tx1"/>
           </a:solidFill>
@@ -2915,7 +2891,7 @@
         </a:spcBef>
         <a:buFont typeface="Arial"/>
         <a:buChar char="•"/>
-        <a:defRPr sz="2400" kern="1200">
+        <a:defRPr sz="1600" kern="1200">
           <a:solidFill>
             <a:schemeClr val="tx1"/>
           </a:solidFill>
@@ -2930,7 +2906,7 @@
         </a:spcBef>
         <a:buFont typeface="Arial"/>
         <a:buChar char="–"/>
-        <a:defRPr sz="2000" kern="1200">
+        <a:defRPr sz="1400" kern="1200">
           <a:solidFill>
             <a:schemeClr val="tx1"/>
           </a:solidFill>
@@ -2945,7 +2921,7 @@
         </a:spcBef>
         <a:buFont typeface="Arial"/>
         <a:buChar char="»"/>
-        <a:defRPr sz="2000" kern="1200">
+        <a:defRPr sz="1400" kern="1200">
           <a:solidFill>
             <a:schemeClr val="tx1"/>
           </a:solidFill>
@@ -3131,45 +3107,46 @@
             <a:spLocks noGrp="1"/>
           </p:cNvSpPr>
           <p:nvPr>
-            <p:ph type="title"/>
-          </p:nvPr>
-        </p:nvSpPr>
-        <p:spPr/>
-        <p:txBody>
-          <a:bodyPr/>
-          <a:lstStyle/>
-          <a:p>
-            <a:r>
-              <a:t>Instructor Answer Key</a:t>
-            </a:r>
-          </a:p>
-          <a:p>
-            <a:r>
-              <a:t>Treatment Pathway Analysis (Diabetes)</a:t>
-            </a:r>
-          </a:p>
-        </p:txBody>
-      </p:sp>
-      <p:sp>
-        <p:nvSpPr>
-          <p:cNvPr id="3" name="Content Placeholder 2"/>
-          <p:cNvSpPr>
-            <a:spLocks noGrp="1"/>
-          </p:cNvSpPr>
-          <p:nvPr>
-            <p:ph idx="1"/>
-          </p:nvPr>
-        </p:nvSpPr>
-        <p:spPr/>
-        <p:txBody>
-          <a:bodyPr/>
-          <a:lstStyle/>
-          <a:p>
+            <p:ph type="ctrTitle"/>
+          </p:nvPr>
+        </p:nvSpPr>
+        <p:spPr/>
+        <p:txBody>
+          <a:bodyPr/>
+          <a:lstStyle/>
+          <a:p>
+            <a:r>
+              <a:t>Instructor Answer Key: Treatment Pathway Analysis (Diabetes)</a:t>
+            </a:r>
+          </a:p>
+        </p:txBody>
+      </p:sp>
+      <p:sp>
+        <p:nvSpPr>
+          <p:cNvPr id="3" name="Subtitle 2"/>
+          <p:cNvSpPr>
+            <a:spLocks noGrp="1"/>
+          </p:cNvSpPr>
+          <p:nvPr>
+            <p:ph type="subTitle" idx="1"/>
+          </p:nvPr>
+        </p:nvSpPr>
+        <p:spPr/>
+        <p:txBody>
+          <a:bodyPr/>
+          <a:lstStyle/>
+          <a:p>
+            <a:pPr marL="0" indent="0">
+              <a:buNone/>
+            </a:pPr>
             <a:r>
               <a:t>Ranged / Descriptive Answers</a:t>
             </a:r>
           </a:p>
           <a:p>
+            <a:pPr marL="0" indent="0">
+              <a:buNone/>
+            </a:pPr>
             <a:r>
               <a:t>For Instructor Use Only</a:t>
             </a:r>
@@ -3230,18 +3207,24 @@
           <a:bodyPr/>
           <a:lstStyle/>
           <a:p>
-            <a:r>
-              <a:t>- Exact % meaning</a:t>
-            </a:r>
-          </a:p>
-          <a:p>
-            <a:r>
-              <a:t>- Causality</a:t>
-            </a:r>
-          </a:p>
-          <a:p>
-            <a:r>
-              <a:t>- Guideline assumptions</a:t>
+            <a:pPr/>
+            <a:r>
+              <a:rPr sz="2400"/>
+              <a:t>Exact % meaning</a:t>
+            </a:r>
+          </a:p>
+          <a:p>
+            <a:pPr/>
+            <a:r>
+              <a:rPr sz="2400"/>
+              <a:t>Causality</a:t>
+            </a:r>
+          </a:p>
+          <a:p>
+            <a:pPr/>
+            <a:r>
+              <a:rPr sz="2400"/>
+              <a:t>Guideline assumptions</a:t>
             </a:r>
           </a:p>
         </p:txBody>
@@ -3300,13 +3283,17 @@
           <a:bodyPr/>
           <a:lstStyle/>
           <a:p>
-            <a:r>
-              <a:t>- Design drives results</a:t>
-            </a:r>
-          </a:p>
-          <a:p>
-            <a:r>
-              <a:t>- Descriptive only</a:t>
+            <a:pPr/>
+            <a:r>
+              <a:rPr sz="2400"/>
+              <a:t>Design drives results</a:t>
+            </a:r>
+          </a:p>
+          <a:p>
+            <a:pPr/>
+            <a:r>
+              <a:rPr sz="2400"/>
+              <a:t>Descriptive only</a:t>
             </a:r>
           </a:p>
         </p:txBody>
@@ -3365,18 +3352,24 @@
           <a:bodyPr/>
           <a:lstStyle/>
           <a:p>
-            <a:r>
-              <a:t>- No drugs</a:t>
-            </a:r>
-          </a:p>
-          <a:p>
-            <a:r>
-              <a:t>- Insulin first-line</a:t>
-            </a:r>
-          </a:p>
-          <a:p>
-            <a:r>
-              <a:t>- Extreme fragmentation</a:t>
+            <a:pPr/>
+            <a:r>
+              <a:rPr sz="2400"/>
+              <a:t>No drugs</a:t>
+            </a:r>
+          </a:p>
+          <a:p>
+            <a:pPr/>
+            <a:r>
+              <a:rPr sz="2400"/>
+              <a:t>A first step that does not fit the cohort design (check prior exposure)</a:t>
+            </a:r>
+          </a:p>
+          <a:p>
+            <a:pPr/>
+            <a:r>
+              <a:rPr sz="2400"/>
+              <a:t>Extreme fragmentation</a:t>
             </a:r>
           </a:p>
         </p:txBody>
@@ -3422,31 +3415,40 @@
       </p:sp>
       <p:sp>
         <p:nvSpPr>
-          <p:cNvPr id="3" name="Content Placeholder 2"/>
-          <p:cNvSpPr>
-            <a:spLocks noGrp="1"/>
-          </p:cNvSpPr>
-          <p:nvPr>
-            <p:ph idx="1"/>
-          </p:nvPr>
-        </p:nvSpPr>
-        <p:spPr/>
-        <p:txBody>
-          <a:bodyPr/>
-          <a:lstStyle/>
-          <a:p>
+          <p:cNvPr id="3" name="Text Placeholder 2"/>
+          <p:cNvSpPr>
+            <a:spLocks noGrp="1"/>
+          </p:cNvSpPr>
+          <p:nvPr>
+            <p:ph type="body" idx="1"/>
+          </p:nvPr>
+        </p:nvSpPr>
+        <p:spPr/>
+        <p:txBody>
+          <a:bodyPr/>
+          <a:lstStyle/>
+          <a:p>
+            <a:pPr marL="0" indent="0">
+              <a:buNone/>
+            </a:pPr>
             <a:r>
               <a:t>Focus discussion on:</a:t>
             </a:r>
           </a:p>
           <a:p>
-            <a:r>
-              <a:t>- Why patterns differ</a:t>
-            </a:r>
-          </a:p>
-          <a:p>
-            <a:r>
-              <a:t>- Assumptions</a:t>
+            <a:pPr marL="0" indent="0">
+              <a:buNone/>
+            </a:pPr>
+            <a:r>
+              <a:t>Why patterns differ</a:t>
+            </a:r>
+          </a:p>
+          <a:p>
+            <a:pPr marL="0" indent="0">
+              <a:buNone/>
+            </a:pPr>
+            <a:r>
+              <a:t>Assumptions</a:t>
             </a:r>
           </a:p>
         </p:txBody>
@@ -3505,18 +3507,24 @@
           <a:bodyPr/>
           <a:lstStyle/>
           <a:p>
-            <a:r>
-              <a:t>- Results vary by database</a:t>
-            </a:r>
-          </a:p>
-          <a:p>
-            <a:r>
-              <a:t>- Focus on patterns, not exact percentages</a:t>
-            </a:r>
-          </a:p>
-          <a:p>
-            <a:r>
-              <a:t>- Use ranges and directionality</a:t>
+            <a:pPr/>
+            <a:r>
+              <a:rPr sz="2400"/>
+              <a:t>Results vary by database</a:t>
+            </a:r>
+          </a:p>
+          <a:p>
+            <a:pPr/>
+            <a:r>
+              <a:rPr sz="2400"/>
+              <a:t>Focus on patterns, not exact percentages</a:t>
+            </a:r>
+          </a:p>
+          <a:p>
+            <a:pPr/>
+            <a:r>
+              <a:rPr sz="2400"/>
+              <a:t>Use ranges and directionality</a:t>
             </a:r>
           </a:p>
         </p:txBody>
@@ -3575,24 +3583,35 @@
           <a:bodyPr/>
           <a:lstStyle/>
           <a:p>
-            <a:r>
-              <a:t>Expected:</a:t>
-            </a:r>
-          </a:p>
-          <a:p>
-            <a:r>
-              <a:t>- Metformin dominant</a:t>
-            </a:r>
-          </a:p>
-          <a:p/>
-          <a:p>
-            <a:r>
-              <a:t>Range:</a:t>
-            </a:r>
-          </a:p>
-          <a:p>
-            <a:r>
-              <a:t>&gt;50–70%</a:t>
+            <a:pPr marL="0" indent="0">
+              <a:buNone/>
+            </a:pPr>
+            <a:r>
+              <a:rPr sz="2400"/>
+              <a:t>Often reported:</a:t>
+            </a:r>
+          </a:p>
+          <a:p>
+            <a:pPr/>
+            <a:r>
+              <a:rPr sz="2400"/>
+              <a:t>Metformin as the largest first-ring arc</a:t>
+            </a:r>
+          </a:p>
+          <a:p>
+            <a:pPr marL="0" indent="0">
+              <a:buNone/>
+            </a:pPr>
+            <a:r>
+              <a:rPr sz="2400"/>
+              <a:t>No fixed range:</a:t>
+            </a:r>
+          </a:p>
+          <a:p>
+            <a:pPr/>
+            <a:r>
+              <a:rPr sz="2400"/>
+              <a:t>the percent depends on the database and the cohort definitions</a:t>
             </a:r>
           </a:p>
         </p:txBody>
@@ -3651,23 +3670,33 @@
           <a:bodyPr/>
           <a:lstStyle/>
           <a:p>
-            <a:r>
+            <a:pPr marL="0" indent="0">
+              <a:buNone/>
+            </a:pPr>
+            <a:r>
+              <a:rPr sz="2400"/>
               <a:t>If not metformin:</a:t>
             </a:r>
           </a:p>
           <a:p>
-            <a:r>
-              <a:t>- Check cohort</a:t>
-            </a:r>
-          </a:p>
-          <a:p>
-            <a:r>
-              <a:t>- Prior exposure</a:t>
-            </a:r>
-          </a:p>
-          <a:p>
-            <a:r>
-              <a:t>- Mapping</a:t>
+            <a:pPr/>
+            <a:r>
+              <a:rPr sz="2400"/>
+              <a:t>Check cohort</a:t>
+            </a:r>
+          </a:p>
+          <a:p>
+            <a:pPr/>
+            <a:r>
+              <a:rPr sz="2400"/>
+              <a:t>Prior exposure</a:t>
+            </a:r>
+          </a:p>
+          <a:p>
+            <a:pPr/>
+            <a:r>
+              <a:rPr sz="2400"/>
+              <a:t>Mapping</a:t>
             </a:r>
           </a:p>
         </p:txBody>
@@ -3726,24 +3755,35 @@
           <a:bodyPr/>
           <a:lstStyle/>
           <a:p>
-            <a:r>
-              <a:t>Expected:</a:t>
-            </a:r>
-          </a:p>
-          <a:p>
-            <a:r>
-              <a:t>- Minority escalate</a:t>
-            </a:r>
-          </a:p>
-          <a:p/>
-          <a:p>
-            <a:r>
-              <a:t>Range:</a:t>
-            </a:r>
-          </a:p>
-          <a:p>
-            <a:r>
-              <a:t>~10–30%</a:t>
+            <a:pPr marL="0" indent="0">
+              <a:buNone/>
+            </a:pPr>
+            <a:r>
+              <a:rPr sz="2400"/>
+              <a:t>Record:</a:t>
+            </a:r>
+          </a:p>
+          <a:p>
+            <a:pPr/>
+            <a:r>
+              <a:rPr sz="2400"/>
+              <a:t>The percent of paths that reach insulin</a:t>
+            </a:r>
+          </a:p>
+          <a:p>
+            <a:pPr marL="0" indent="0">
+              <a:buNone/>
+            </a:pPr>
+            <a:r>
+              <a:rPr sz="2400"/>
+              <a:t>No fixed range:</a:t>
+            </a:r>
+          </a:p>
+          <a:p>
+            <a:pPr/>
+            <a:r>
+              <a:rPr sz="2400"/>
+              <a:t>the percent depends on follow-up length and the population</a:t>
             </a:r>
           </a:p>
         </p:txBody>
@@ -3802,23 +3842,33 @@
           <a:bodyPr/>
           <a:lstStyle/>
           <a:p>
-            <a:r>
+            <a:pPr marL="0" indent="0">
+              <a:buNone/>
+            </a:pPr>
+            <a:r>
+              <a:rPr sz="2400"/>
               <a:t>Higher insulin:</a:t>
             </a:r>
           </a:p>
           <a:p>
-            <a:r>
-              <a:t>- Longer follow-up</a:t>
-            </a:r>
-          </a:p>
-          <a:p>
-            <a:r>
-              <a:t>- Older/sicker</a:t>
-            </a:r>
-          </a:p>
-          <a:p>
-            <a:r>
-              <a:t>- Claims data</a:t>
+            <a:pPr/>
+            <a:r>
+              <a:rPr sz="2400"/>
+              <a:t>Longer follow-up</a:t>
+            </a:r>
+          </a:p>
+          <a:p>
+            <a:pPr/>
+            <a:r>
+              <a:rPr sz="2400"/>
+              <a:t>Older/sicker</a:t>
+            </a:r>
+          </a:p>
+          <a:p>
+            <a:pPr/>
+            <a:r>
+              <a:rPr sz="2400"/>
+              <a:t>Claims data</a:t>
             </a:r>
           </a:p>
         </p:txBody>
@@ -3877,18 +3927,25 @@
           <a:bodyPr/>
           <a:lstStyle/>
           <a:p>
-            <a:r>
-              <a:t>Expected:</a:t>
-            </a:r>
-          </a:p>
-          <a:p>
-            <a:r>
-              <a:t>- Older escalate earlier</a:t>
-            </a:r>
-          </a:p>
-          <a:p/>
-          <a:p>
-            <a:r>
+            <a:pPr marL="0" indent="0">
+              <a:buNone/>
+            </a:pPr>
+            <a:r>
+              <a:rPr sz="2400"/>
+              <a:t>Accept:</a:t>
+            </a:r>
+          </a:p>
+          <a:p>
+            <a:pPr/>
+            <a:r>
+              <a:rPr sz="2400"/>
+              <a:t>A description of what the two age cohorts show</a:t>
+            </a:r>
+          </a:p>
+          <a:p>
+            <a:pPr/>
+            <a:r>
+              <a:rPr sz="2400"/>
               <a:t>Any visible difference acceptable</a:t>
             </a:r>
           </a:p>
@@ -3948,18 +4005,26 @@
           <a:bodyPr/>
           <a:lstStyle/>
           <a:p>
-            <a:r>
+            <a:pPr marL="0" indent="0">
+              <a:buNone/>
+            </a:pPr>
+            <a:r>
+              <a:rPr sz="2400"/>
               <a:t>No difference:</a:t>
             </a:r>
           </a:p>
           <a:p>
-            <a:r>
-              <a:t>- Small subgroups</a:t>
-            </a:r>
-          </a:p>
-          <a:p>
-            <a:r>
-              <a:t>- Short follow-up</a:t>
+            <a:pPr/>
+            <a:r>
+              <a:rPr sz="2400"/>
+              <a:t>Small subgroups</a:t>
+            </a:r>
+          </a:p>
+          <a:p>
+            <a:pPr/>
+            <a:r>
+              <a:rPr sz="2400"/>
+              <a:t>Short follow-up</a:t>
             </a:r>
           </a:p>
         </p:txBody>
@@ -4018,18 +4083,24 @@
           <a:bodyPr/>
           <a:lstStyle/>
           <a:p>
-            <a:r>
-              <a:t>- Strong first ring</a:t>
-            </a:r>
-          </a:p>
-          <a:p>
-            <a:r>
-              <a:t>- More branching later</a:t>
-            </a:r>
-          </a:p>
-          <a:p>
-            <a:r>
-              <a:t>- Grey grows</a:t>
+            <a:pPr/>
+            <a:r>
+              <a:rPr sz="2400"/>
+              <a:t>Strong first ring</a:t>
+            </a:r>
+          </a:p>
+          <a:p>
+            <a:pPr/>
+            <a:r>
+              <a:rPr sz="2400"/>
+              <a:t>More branching later</a:t>
+            </a:r>
+          </a:p>
+          <a:p>
+            <a:pPr/>
+            <a:r>
+              <a:rPr sz="2400"/>
+              <a:t>Grey (end of pathway) grows in later rings</a:t>
             </a:r>
           </a:p>
         </p:txBody>
@@ -4045,7 +4116,7 @@
 <file path=ppt/theme/theme1.xml><?xml version="1.0" encoding="utf-8"?>
 <a:theme xmlns:a="http://schemas.openxmlformats.org/drawingml/2006/main" name="Office Theme">
   <a:themeElements>
-    <a:clrScheme name="ALS TDI">
+    <a:clrScheme name="Office">
       <a:dk1>
         <a:sysClr val="windowText" lastClr="000000"/>
       </a:dk1>
@@ -4053,39 +4124,39 @@
         <a:sysClr val="window" lastClr="FFFFFF"/>
       </a:lt1>
       <a:dk2>
-        <a:srgbClr val="6D2F77"/>
+        <a:srgbClr val="262626"/>
       </a:dk2>
       <a:lt2>
-        <a:srgbClr val="F2EAF4"/>
+        <a:srgbClr val="F2F2F2"/>
       </a:lt2>
       <a:accent1>
-        <a:srgbClr val="904199"/>
+        <a:srgbClr val="404040"/>
       </a:accent1>
       <a:accent2>
-        <a:srgbClr val="B872C0"/>
+        <a:srgbClr val="7F7F7F"/>
       </a:accent2>
       <a:accent3>
-        <a:srgbClr val="6D2F77"/>
+        <a:srgbClr val="A6A6A6"/>
       </a:accent3>
       <a:accent4>
-        <a:srgbClr val="4A4A4A"/>
+        <a:srgbClr val="595959"/>
       </a:accent4>
       <a:accent5>
-        <a:srgbClr val="D9C2DE"/>
+        <a:srgbClr val="BFBFBF"/>
       </a:accent5>
       <a:accent6>
-        <a:srgbClr val="7A3580"/>
+        <a:srgbClr val="262626"/>
       </a:accent6>
       <a:hlink>
-        <a:srgbClr val="904199"/>
+        <a:srgbClr val="000000"/>
       </a:hlink>
       <a:folHlink>
-        <a:srgbClr val="6D2F77"/>
+        <a:srgbClr val="404040"/>
       </a:folHlink>
     </a:clrScheme>
     <a:fontScheme name="Office">
       <a:majorFont>
-        <a:latin typeface="EB Garamond"/>
+        <a:latin typeface="Calibri"/>
         <a:ea typeface=""/>
         <a:cs typeface=""/>
         <a:font script="Jpan" typeface="ＭＳ Ｐゴシック"/>

--- a/docs/free-rwe-resources/train-the-trainer/training/day-05-treatment-pathways/kit/Instructor-Answer-Key.pptx
+++ b/docs/free-rwe-resources/train-the-trainer/training/day-05-treatment-pathways/kit/Instructor-Answer-Key.pptx
@@ -3116,7 +3116,7 @@
           <a:lstStyle/>
           <a:p>
             <a:r>
-              <a:t>Instructor Answer Key: Treatment Pathway Analysis (Diabetes)</a:t>
+              <a:t>Instructor Answer Key: Treatment Pathway Analysis (ALS Medications)</a:t>
             </a:r>
           </a:p>
         </p:txBody>
@@ -3595,7 +3595,7 @@
             <a:pPr/>
             <a:r>
               <a:rPr sz="2400"/>
-              <a:t>Metformin as the largest first-ring arc</a:t>
+              <a:t>The largest first-ring arc and its medication</a:t>
             </a:r>
           </a:p>
           <a:p>
@@ -3675,7 +3675,7 @@
             </a:pPr>
             <a:r>
               <a:rPr sz="2400"/>
-              <a:t>If not metformin:</a:t>
+              <a:t>If the first step is unexpected:</a:t>
             </a:r>
           </a:p>
           <a:p>
@@ -3735,7 +3735,7 @@
           <a:lstStyle/>
           <a:p>
             <a:r>
-              <a:t>Exercise 2: Insulin Escalation</a:t>
+              <a:t>Exercise 2: Edaravone After Riluzole</a:t>
             </a:r>
           </a:p>
         </p:txBody>
@@ -3767,7 +3767,7 @@
             <a:pPr/>
             <a:r>
               <a:rPr sz="2400"/>
-              <a:t>The percent of paths that reach insulin</a:t>
+              <a:t>The percent of paths that include edaravone</a:t>
             </a:r>
           </a:p>
           <a:p>
@@ -3847,7 +3847,7 @@
             </a:pPr>
             <a:r>
               <a:rPr sz="2400"/>
-              <a:t>Higher insulin:</a:t>
+              <a:t>A higher share with edaravone:</a:t>
             </a:r>
           </a:p>
           <a:p>
